--- a/Presentation.pptx
+++ b/Presentation.pptx
@@ -213,7 +213,7 @@
           <a:p>
             <a:fld id="{D7032971-3A1B-47C5-9A28-7D855EC2FD38}" type="datetimeFigureOut">
               <a:rPr lang="en-US" smtClean="0"/>
-              <a:t>5/9/2026</a:t>
+              <a:t>5/10/2026</a:t>
             </a:fld>
             <a:endParaRPr lang="en-US"/>
           </a:p>
@@ -711,7 +711,7 @@
           <a:p>
             <a:fld id="{4C319ABC-FFA0-4F18-9EBE-62FF5CA1620A}" type="datetimeFigureOut">
               <a:rPr lang="en-US" smtClean="0"/>
-              <a:t>5/9/2026</a:t>
+              <a:t>5/10/2026</a:t>
             </a:fld>
             <a:endParaRPr lang="en-US"/>
           </a:p>
@@ -909,7 +909,7 @@
           <a:p>
             <a:fld id="{4C319ABC-FFA0-4F18-9EBE-62FF5CA1620A}" type="datetimeFigureOut">
               <a:rPr lang="en-US" smtClean="0"/>
-              <a:t>5/9/2026</a:t>
+              <a:t>5/10/2026</a:t>
             </a:fld>
             <a:endParaRPr lang="en-US"/>
           </a:p>
@@ -1117,7 +1117,7 @@
           <a:p>
             <a:fld id="{4C319ABC-FFA0-4F18-9EBE-62FF5CA1620A}" type="datetimeFigureOut">
               <a:rPr lang="en-US" smtClean="0"/>
-              <a:t>5/9/2026</a:t>
+              <a:t>5/10/2026</a:t>
             </a:fld>
             <a:endParaRPr lang="en-US"/>
           </a:p>
@@ -1315,7 +1315,7 @@
           <a:p>
             <a:fld id="{4C319ABC-FFA0-4F18-9EBE-62FF5CA1620A}" type="datetimeFigureOut">
               <a:rPr lang="en-US" smtClean="0"/>
-              <a:t>5/9/2026</a:t>
+              <a:t>5/10/2026</a:t>
             </a:fld>
             <a:endParaRPr lang="en-US"/>
           </a:p>
@@ -1590,7 +1590,7 @@
           <a:p>
             <a:fld id="{4C319ABC-FFA0-4F18-9EBE-62FF5CA1620A}" type="datetimeFigureOut">
               <a:rPr lang="en-US" smtClean="0"/>
-              <a:t>5/9/2026</a:t>
+              <a:t>5/10/2026</a:t>
             </a:fld>
             <a:endParaRPr lang="en-US"/>
           </a:p>
@@ -1855,7 +1855,7 @@
           <a:p>
             <a:fld id="{4C319ABC-FFA0-4F18-9EBE-62FF5CA1620A}" type="datetimeFigureOut">
               <a:rPr lang="en-US" smtClean="0"/>
-              <a:t>5/9/2026</a:t>
+              <a:t>5/10/2026</a:t>
             </a:fld>
             <a:endParaRPr lang="en-US"/>
           </a:p>
@@ -2267,7 +2267,7 @@
           <a:p>
             <a:fld id="{4C319ABC-FFA0-4F18-9EBE-62FF5CA1620A}" type="datetimeFigureOut">
               <a:rPr lang="en-US" smtClean="0"/>
-              <a:t>5/9/2026</a:t>
+              <a:t>5/10/2026</a:t>
             </a:fld>
             <a:endParaRPr lang="en-US"/>
           </a:p>
@@ -2408,7 +2408,7 @@
           <a:p>
             <a:fld id="{4C319ABC-FFA0-4F18-9EBE-62FF5CA1620A}" type="datetimeFigureOut">
               <a:rPr lang="en-US" smtClean="0"/>
-              <a:t>5/9/2026</a:t>
+              <a:t>5/10/2026</a:t>
             </a:fld>
             <a:endParaRPr lang="en-US"/>
           </a:p>
@@ -2521,7 +2521,7 @@
           <a:p>
             <a:fld id="{4C319ABC-FFA0-4F18-9EBE-62FF5CA1620A}" type="datetimeFigureOut">
               <a:rPr lang="en-US" smtClean="0"/>
-              <a:t>5/9/2026</a:t>
+              <a:t>5/10/2026</a:t>
             </a:fld>
             <a:endParaRPr lang="en-US"/>
           </a:p>
@@ -2832,7 +2832,7 @@
           <a:p>
             <a:fld id="{4C319ABC-FFA0-4F18-9EBE-62FF5CA1620A}" type="datetimeFigureOut">
               <a:rPr lang="en-US" smtClean="0"/>
-              <a:t>5/9/2026</a:t>
+              <a:t>5/10/2026</a:t>
             </a:fld>
             <a:endParaRPr lang="en-US"/>
           </a:p>
@@ -3120,7 +3120,7 @@
           <a:p>
             <a:fld id="{4C319ABC-FFA0-4F18-9EBE-62FF5CA1620A}" type="datetimeFigureOut">
               <a:rPr lang="en-US" smtClean="0"/>
-              <a:t>5/9/2026</a:t>
+              <a:t>5/10/2026</a:t>
             </a:fld>
             <a:endParaRPr lang="en-US"/>
           </a:p>
@@ -3361,7 +3361,7 @@
           <a:p>
             <a:fld id="{4C319ABC-FFA0-4F18-9EBE-62FF5CA1620A}" type="datetimeFigureOut">
               <a:rPr lang="en-US" smtClean="0"/>
-              <a:t>5/9/2026</a:t>
+              <a:t>5/10/2026</a:t>
             </a:fld>
             <a:endParaRPr lang="en-US"/>
           </a:p>
@@ -3952,7 +3952,7 @@
             </a:r>
             <a:r>
               <a:rPr lang="en-US" dirty="0"/>
-              <a:t> El Sewedy University of Technology (EUT)</a:t>
+              <a:t> El Sewedy University of Technology (SUT)</a:t>
             </a:r>
           </a:p>
         </p:txBody>
